--- a/Azure.pptx
+++ b/Azure.pptx
@@ -5,13 +5,16 @@
     <p:sldMasterId id="2147483659" r:id="rId1"/>
   </p:sldMasterIdLst>
   <p:notesMasterIdLst>
-    <p:notesMasterId r:id="rId6"/>
+    <p:notesMasterId r:id="rId9"/>
   </p:notesMasterIdLst>
   <p:sldIdLst>
     <p:sldId id="313" r:id="rId2"/>
     <p:sldId id="314" r:id="rId3"/>
-    <p:sldId id="315" r:id="rId4"/>
-    <p:sldId id="316" r:id="rId5"/>
+    <p:sldId id="319" r:id="rId4"/>
+    <p:sldId id="317" r:id="rId5"/>
+    <p:sldId id="318" r:id="rId6"/>
+    <p:sldId id="315" r:id="rId7"/>
+    <p:sldId id="316" r:id="rId8"/>
   </p:sldIdLst>
   <p:sldSz cx="12192000" cy="6858000"/>
   <p:notesSz cx="6858000" cy="9144000"/>
@@ -12683,8 +12686,8 @@
         </p:nvSpPr>
         <p:spPr>
           <a:xfrm>
-            <a:off x="0" y="58846"/>
-            <a:ext cx="11338560" cy="6740307"/>
+            <a:off x="215153" y="152975"/>
+            <a:ext cx="11338560" cy="3970318"/>
           </a:xfrm>
           <a:prstGeom prst="rect">
             <a:avLst/>
@@ -12718,12 +12721,66 @@
           <a:p>
             <a:r>
               <a:rPr lang="en-US" sz="1200" dirty="0"/>
-              <a:t> - </a:t>
+              <a:t>Login into  </a:t>
+            </a:r>
+            <a:r>
+              <a:rPr lang="en-US" sz="1200" dirty="0" err="1"/>
+              <a:t>portal.azure.com</a:t>
+            </a:r>
+            <a:r>
+              <a:rPr lang="en-US" sz="1200" dirty="0"/>
+              <a:t>  ( </a:t>
             </a:r>
             <a:r>
               <a:rPr lang="en-US" sz="1200" dirty="0">
                 <a:hlinkClick r:id="rId3"/>
               </a:rPr>
+              <a:t>https://portal.azure.com</a:t>
+            </a:r>
+            <a:r>
+              <a:rPr lang="en-US" sz="1200" dirty="0"/>
+              <a:t> )</a:t>
+            </a:r>
+          </a:p>
+          <a:p>
+            <a:r>
+              <a:rPr lang="en-US" sz="1200" dirty="0"/>
+              <a:t>Move mouse to top-right and click on your icon (sign-in/sign-out) – and select a directory.</a:t>
+            </a:r>
+          </a:p>
+          <a:p>
+            <a:r>
+              <a:rPr lang="en-US" sz="1200" dirty="0"/>
+              <a:t>You may have several directories corresponding to your work with different clients.</a:t>
+            </a:r>
+          </a:p>
+          <a:p>
+            <a:endParaRPr lang="en-US" sz="1200" dirty="0"/>
+          </a:p>
+          <a:p>
+            <a:r>
+              <a:rPr lang="en-US" sz="1200" dirty="0"/>
+              <a:t>Then select subscription</a:t>
+            </a:r>
+          </a:p>
+          <a:p>
+            <a:r>
+              <a:rPr lang="en-US" sz="1200" dirty="0"/>
+              <a:t>Then go to Machine learning (can search for it, or it is in the list)</a:t>
+            </a:r>
+          </a:p>
+          <a:p>
+            <a:endParaRPr lang="en-US" sz="1200" dirty="0"/>
+          </a:p>
+          <a:p>
+            <a:r>
+              <a:rPr lang="en-US" sz="1200" dirty="0"/>
+              <a:t> - </a:t>
+            </a:r>
+            <a:r>
+              <a:rPr lang="en-US" sz="1200" dirty="0">
+                <a:hlinkClick r:id="rId4"/>
+              </a:rPr>
               <a:t>https://ml.azure.com/selectWorkspace</a:t>
             </a:r>
             <a:r>
@@ -12734,7 +12791,15 @@
           <a:p>
             <a:r>
               <a:rPr lang="en-US" sz="1200" dirty="0"/>
-              <a:t>Select Directory and Subscription, go into workspace machine learning, then to </a:t>
+              <a:t>Go into workspace machine learning, then find and click the </a:t>
+            </a:r>
+            <a:r>
+              <a:rPr lang="en-US" sz="1200" dirty="0" err="1"/>
+              <a:t>url</a:t>
+            </a:r>
+            <a:r>
+              <a:rPr lang="en-US" sz="1200" dirty="0"/>
+              <a:t> to </a:t>
             </a:r>
             <a:r>
               <a:rPr lang="en-US" sz="1200" b="1" dirty="0"/>
@@ -12745,7 +12810,43 @@
           <a:p>
             <a:r>
               <a:rPr lang="en-US" sz="1200" dirty="0"/>
-              <a:t>Here you can work with python notebooks, create compute instances or clusters, work with multiple data stores, create datasets, pipelines, experiments, run Automated ML, create pickle model files, use different open-source libraries (</a:t>
+              <a:t>Here you can work with python notebooks, </a:t>
+            </a:r>
+          </a:p>
+          <a:p>
+            <a:r>
+              <a:rPr lang="en-US" sz="1200" dirty="0"/>
+              <a:t>create compute instances or clusters, </a:t>
+            </a:r>
+          </a:p>
+          <a:p>
+            <a:r>
+              <a:rPr lang="en-US" sz="1200" dirty="0"/>
+              <a:t>work with multiple data stores, </a:t>
+            </a:r>
+          </a:p>
+          <a:p>
+            <a:r>
+              <a:rPr lang="en-US" sz="1200" dirty="0"/>
+              <a:t>create datasets, pipelines, experiments, </a:t>
+            </a:r>
+          </a:p>
+          <a:p>
+            <a:r>
+              <a:rPr lang="en-US" sz="1200" dirty="0"/>
+              <a:t>run Automated ML, </a:t>
+            </a:r>
+          </a:p>
+          <a:p>
+            <a:r>
+              <a:rPr lang="en-US" sz="1200" dirty="0"/>
+              <a:t>create pickle model files, </a:t>
+            </a:r>
+          </a:p>
+          <a:p>
+            <a:r>
+              <a:rPr lang="en-US" sz="1200" dirty="0"/>
+              <a:t>use different open-source libraries (</a:t>
             </a:r>
             <a:r>
               <a:rPr lang="en-US" sz="1200" dirty="0" err="1"/>
@@ -12753,346 +12854,19 @@
             </a:r>
             <a:r>
               <a:rPr lang="en-US" sz="1200" dirty="0"/>
-              <a:t>, TF, etc.), register model endpoints, etc.</a:t>
+              <a:t>, TF, etc.), </a:t>
+            </a:r>
+          </a:p>
+          <a:p>
+            <a:r>
+              <a:rPr lang="en-US" sz="1200" dirty="0"/>
+              <a:t>register model endpoints, etc.</a:t>
             </a:r>
           </a:p>
           <a:p>
             <a:r>
               <a:rPr lang="en-US" sz="1200" dirty="0"/>
               <a:t># ----------------------------------------------</a:t>
-            </a:r>
-          </a:p>
-          <a:p>
-            <a:r>
-              <a:rPr lang="en-US" sz="1200" dirty="0"/>
-              <a:t>Good </a:t>
-            </a:r>
-            <a:r>
-              <a:rPr lang="en-US" sz="1200" dirty="0" err="1"/>
-              <a:t>youtube</a:t>
-            </a:r>
-            <a:r>
-              <a:rPr lang="en-US" sz="1200" dirty="0"/>
-              <a:t> video "Train and deploy ML models at scale using Azure Machine Learning | INT134C"  - </a:t>
-            </a:r>
-          </a:p>
-          <a:p>
-            <a:r>
-              <a:rPr lang="en-US" sz="1200" dirty="0"/>
-              <a:t>- </a:t>
-            </a:r>
-            <a:r>
-              <a:rPr lang="en-US" sz="1200" u="sng" dirty="0">
-                <a:hlinkClick r:id="rId4" tooltip="https://www.youtube.com/watch?v=2ogbxycnvgk"/>
-              </a:rPr>
-              <a:t>https://www.youtube.com/watch?v=2OgBxYCnVGk</a:t>
-            </a:r>
-            <a:r>
-              <a:rPr lang="en-US" sz="1200" dirty="0"/>
-              <a:t> </a:t>
-            </a:r>
-          </a:p>
-          <a:p>
-            <a:r>
-              <a:rPr lang="en-US" sz="1200" dirty="0"/>
-              <a:t>And here is the link from this video to a good 10-hrs course: "Build AI solutions with Azure Machine Learning" - 10 </a:t>
-            </a:r>
-            <a:r>
-              <a:rPr lang="en-US" sz="1200" dirty="0" err="1"/>
-              <a:t>hrs</a:t>
-            </a:r>
-            <a:r>
-              <a:rPr lang="en-US" sz="1200" dirty="0"/>
-              <a:t> - </a:t>
-            </a:r>
-            <a:br>
-              <a:rPr lang="en-US" sz="1200" dirty="0"/>
-            </a:br>
-            <a:r>
-              <a:rPr lang="en-US" sz="1200" dirty="0"/>
-              <a:t> - </a:t>
-            </a:r>
-            <a:r>
-              <a:rPr lang="en-US" sz="1200" u="sng" dirty="0">
-                <a:hlinkClick r:id="rId5" tooltip="https://docs.microsoft.com/en-us/learn/paths/build-ai-solutions-with-azure-ml-service/"/>
-              </a:rPr>
-              <a:t>https://docs.microsoft.com/en-us/learn/paths/build-ai-solutions-with-azure-ml-service/</a:t>
-            </a:r>
-            <a:endParaRPr lang="en-US" sz="1200" dirty="0"/>
-          </a:p>
-          <a:p>
-            <a:r>
-              <a:rPr lang="en-US" sz="1200" dirty="0"/>
-              <a:t>Yet another good tutorial - "Creating End-to-End </a:t>
-            </a:r>
-            <a:r>
-              <a:rPr lang="en-US" sz="1200" dirty="0" err="1"/>
-              <a:t>MLOps</a:t>
-            </a:r>
-            <a:r>
-              <a:rPr lang="en-US" sz="1200" dirty="0"/>
-              <a:t> pipelines:</a:t>
-            </a:r>
-            <a:br>
-              <a:rPr lang="en-US" sz="1200" dirty="0"/>
-            </a:br>
-            <a:r>
-              <a:rPr lang="en-US" sz="1200" dirty="0"/>
-              <a:t> - </a:t>
-            </a:r>
-            <a:r>
-              <a:rPr lang="en-US" sz="1200" u="sng" dirty="0">
-                <a:hlinkClick r:id="rId6"/>
-              </a:rPr>
-              <a:t>https://benalexkeen.com/creating-end-to-end-mlops-pipelines-using-azure-ml-and-azure-pipelines-part-1/</a:t>
-            </a:r>
-            <a:endParaRPr lang="en-US" sz="1200" dirty="0"/>
-          </a:p>
-          <a:p>
-            <a:r>
-              <a:rPr lang="en-US" sz="1200" dirty="0"/>
-              <a:t>Google-</a:t>
-            </a:r>
-            <a:r>
-              <a:rPr lang="en-US" sz="1200" dirty="0" err="1"/>
-              <a:t>ing</a:t>
-            </a:r>
-            <a:r>
-              <a:rPr lang="en-US" sz="1200" dirty="0"/>
-              <a:t> mount datastore azure ml notebook - </a:t>
-            </a:r>
-          </a:p>
-          <a:p>
-            <a:r>
-              <a:rPr lang="en-US" sz="1200" dirty="0"/>
-              <a:t> - </a:t>
-            </a:r>
-            <a:r>
-              <a:rPr lang="en-US" sz="1200" u="sng" dirty="0">
-                <a:hlinkClick r:id="rId7"/>
-              </a:rPr>
-              <a:t>https://github.com/microsoft/MLOpsPython</a:t>
-            </a:r>
-            <a:r>
-              <a:rPr lang="en-US" sz="1200" dirty="0"/>
-              <a:t> </a:t>
-            </a:r>
-          </a:p>
-          <a:p>
-            <a:r>
-              <a:rPr lang="en-US" sz="1200" dirty="0"/>
-              <a:t> - </a:t>
-            </a:r>
-            <a:r>
-              <a:rPr lang="en-US" sz="1200" u="sng" dirty="0">
-                <a:hlinkClick r:id="rId8"/>
-              </a:rPr>
-              <a:t>https://docs.microsoft.com/en-us/python/api/azureml-core/azureml.core.datastore?view=azure-ml-py</a:t>
-            </a:r>
-            <a:endParaRPr lang="en-US" sz="1200" dirty="0"/>
-          </a:p>
-          <a:p>
-            <a:r>
-              <a:rPr lang="en-US" sz="1200" dirty="0"/>
-              <a:t>Develop for Azure Files with Python - </a:t>
-            </a:r>
-          </a:p>
-          <a:p>
-            <a:r>
-              <a:rPr lang="en-US" sz="1200" dirty="0"/>
-              <a:t> - </a:t>
-            </a:r>
-            <a:r>
-              <a:rPr lang="en-US" sz="1200" u="sng" dirty="0">
-                <a:hlinkClick r:id="rId9"/>
-              </a:rPr>
-              <a:t>https://docs.microsoft.com/en-us/azure/storage/files/storage-python-how-to-use-file-storage</a:t>
-            </a:r>
-            <a:endParaRPr lang="en-US" sz="1200" dirty="0"/>
-          </a:p>
-          <a:p>
-            <a:r>
-              <a:rPr lang="en-US" sz="1200" dirty="0"/>
-              <a:t>Azure for Python Developers - </a:t>
-            </a:r>
-          </a:p>
-          <a:p>
-            <a:r>
-              <a:rPr lang="en-US" sz="1200" dirty="0"/>
-              <a:t> - </a:t>
-            </a:r>
-            <a:r>
-              <a:rPr lang="en-US" sz="1200" u="sng" dirty="0">
-                <a:hlinkClick r:id="rId10"/>
-              </a:rPr>
-              <a:t>https://docs.microsoft.com/en-us/azure/developer/python/</a:t>
-            </a:r>
-            <a:r>
-              <a:rPr lang="en-US" sz="1200" dirty="0"/>
-              <a:t> </a:t>
-            </a:r>
-          </a:p>
-          <a:p>
-            <a:r>
-              <a:rPr lang="en-US" sz="1200" dirty="0"/>
-              <a:t>Azure REST API Reference - </a:t>
-            </a:r>
-          </a:p>
-          <a:p>
-            <a:r>
-              <a:rPr lang="en-US" sz="1200" dirty="0"/>
-              <a:t> - </a:t>
-            </a:r>
-            <a:r>
-              <a:rPr lang="en-US" sz="1200" u="sng" dirty="0">
-                <a:hlinkClick r:id="rId11"/>
-              </a:rPr>
-              <a:t>https://docs.microsoft.com/en-us/rest/api/azure/</a:t>
-            </a:r>
-            <a:endParaRPr lang="en-US" sz="1200" dirty="0"/>
-          </a:p>
-          <a:p>
-            <a:r>
-              <a:rPr lang="en-US" sz="1200" dirty="0"/>
-              <a:t>Azure SDK for Python - </a:t>
-            </a:r>
-          </a:p>
-          <a:p>
-            <a:r>
-              <a:rPr lang="en-US" sz="1200" dirty="0"/>
-              <a:t> - </a:t>
-            </a:r>
-            <a:r>
-              <a:rPr lang="en-US" sz="1200" u="sng" dirty="0">
-                <a:hlinkClick r:id="rId12"/>
-              </a:rPr>
-              <a:t>https://github.com/Azure/azure-sdk-for-python/tree/master/sdk/storage</a:t>
-            </a:r>
-            <a:endParaRPr lang="en-US" sz="1200" dirty="0"/>
-          </a:p>
-          <a:p>
-            <a:r>
-              <a:rPr lang="en-US" sz="1200" dirty="0"/>
-              <a:t> - </a:t>
-            </a:r>
-            <a:r>
-              <a:rPr lang="en-US" sz="1200" u="sng" dirty="0">
-                <a:hlinkClick r:id="rId13"/>
-              </a:rPr>
-              <a:t>https://docs.microsoft.com/en-us/python/api/overview/azure/ml/?view=azure-ml-py</a:t>
-            </a:r>
-            <a:r>
-              <a:rPr lang="en-US" sz="1200" dirty="0"/>
-              <a:t> – </a:t>
-            </a:r>
-          </a:p>
-          <a:p>
-            <a:r>
-              <a:rPr lang="en-US" sz="1200" dirty="0"/>
-              <a:t>Azure SDK – trigger published pipeline - </a:t>
-            </a:r>
-          </a:p>
-          <a:p>
-            <a:r>
-              <a:rPr lang="en-US" sz="1200" dirty="0"/>
-              <a:t> - </a:t>
-            </a:r>
-            <a:r>
-              <a:rPr lang="en-US" sz="1200" dirty="0">
-                <a:hlinkClick r:id="rId14"/>
-              </a:rPr>
-              <a:t>https://docs.microsoft.com/en-us/azure/machine-learning/how-to-trigger-published-pipeline#trigger-pipelines-with-azure-machine-learning-sdk-for-python</a:t>
-            </a:r>
-            <a:r>
-              <a:rPr lang="en-US" sz="1200" dirty="0"/>
-              <a:t> –</a:t>
-            </a:r>
-          </a:p>
-          <a:p>
-            <a:r>
-              <a:rPr lang="en-US" sz="1200" dirty="0"/>
-              <a:t>Automate ML Experiments</a:t>
-            </a:r>
-          </a:p>
-          <a:p>
-            <a:r>
-              <a:rPr lang="en-US" sz="1200" dirty="0"/>
-              <a:t> - </a:t>
-            </a:r>
-            <a:r>
-              <a:rPr lang="en-US" sz="1200" dirty="0">
-                <a:hlinkClick r:id="rId15"/>
-              </a:rPr>
-              <a:t>https://docs.microsoft.com/en-us/azure/machine-learning/how-to-use-automlstep-in-pipelines</a:t>
-            </a:r>
-            <a:r>
-              <a:rPr lang="en-US" sz="1200" dirty="0"/>
-              <a:t> - </a:t>
-            </a:r>
-          </a:p>
-          <a:p>
-            <a:r>
-              <a:rPr lang="en-US" sz="1200" dirty="0"/>
-              <a:t> - </a:t>
-            </a:r>
-            <a:r>
-              <a:rPr lang="en-US" sz="1200" dirty="0">
-                <a:hlinkClick r:id="rId16"/>
-              </a:rPr>
-              <a:t>https://towardsdatascience.com/hidden-tricks-for-running-automl-experiment-from-azure-machine-learning-sdk-915d4e3f840e</a:t>
-            </a:r>
-            <a:r>
-              <a:rPr lang="en-US" sz="1200" dirty="0"/>
-              <a:t> - </a:t>
-            </a:r>
-          </a:p>
-          <a:p>
-            <a:r>
-              <a:rPr lang="en-US" sz="1200" dirty="0"/>
-              <a:t>Understand </a:t>
-            </a:r>
-            <a:r>
-              <a:rPr lang="en-US" sz="1200" dirty="0" err="1"/>
-              <a:t>AutoML</a:t>
-            </a:r>
-            <a:endParaRPr lang="en-US" sz="1200" dirty="0"/>
-          </a:p>
-          <a:p>
-            <a:r>
-              <a:rPr lang="en-US" sz="1200" dirty="0"/>
-              <a:t> - </a:t>
-            </a:r>
-            <a:r>
-              <a:rPr lang="en-US" sz="1200" dirty="0">
-                <a:hlinkClick r:id="rId17"/>
-              </a:rPr>
-              <a:t>https://docs.microsoft.com/en-us/azure/machine-learning/how-to-understand-automated-ml#regressionforecasting-metrics</a:t>
-            </a:r>
-            <a:r>
-              <a:rPr lang="en-US" sz="1200" dirty="0"/>
-              <a:t> - </a:t>
-            </a:r>
-          </a:p>
-          <a:p>
-            <a:r>
-              <a:rPr lang="en-US" sz="1200" dirty="0"/>
-              <a:t> - </a:t>
-            </a:r>
-            <a:r>
-              <a:rPr lang="en-US" sz="1200" dirty="0">
-                <a:hlinkClick r:id="rId18"/>
-              </a:rPr>
-              <a:t>https://docs.microsoft.com/en-us/azure/machine-learning/how-to-configure-auto-train#primary-metric</a:t>
-            </a:r>
-            <a:r>
-              <a:rPr lang="en-US" sz="1200" dirty="0"/>
-              <a:t> - </a:t>
-            </a:r>
-          </a:p>
-          <a:p>
-            <a:r>
-              <a:rPr lang="en-US" sz="1200" dirty="0"/>
-              <a:t> -  </a:t>
             </a:r>
           </a:p>
         </p:txBody>
@@ -13111,6 +12885,1148 @@
 </file>
 
 <file path=ppt/slides/slide3.xml><?xml version="1.0" encoding="utf-8"?>
+<p:sld xmlns:a="http://schemas.openxmlformats.org/drawingml/2006/main" xmlns:r="http://schemas.openxmlformats.org/officeDocument/2006/relationships" xmlns:p="http://schemas.openxmlformats.org/presentationml/2006/main">
+  <p:cSld>
+    <p:spTree>
+      <p:nvGrpSpPr>
+        <p:cNvPr id="1" name=""/>
+        <p:cNvGrpSpPr/>
+        <p:nvPr/>
+      </p:nvGrpSpPr>
+      <p:grpSpPr>
+        <a:xfrm>
+          <a:off x="0" y="0"/>
+          <a:ext cx="0" cy="0"/>
+          <a:chOff x="0" y="0"/>
+          <a:chExt cx="0" cy="0"/>
+        </a:xfrm>
+      </p:grpSpPr>
+      <p:sp>
+        <p:nvSpPr>
+          <p:cNvPr id="7" name="TextBox 6">
+            <a:extLst>
+              <a:ext uri="{FF2B5EF4-FFF2-40B4-BE49-F238E27FC236}">
+                <a16:creationId xmlns:a16="http://schemas.microsoft.com/office/drawing/2014/main" id="{7384ECF0-3C64-8241-99B2-0AA612206F2C}"/>
+              </a:ext>
+            </a:extLst>
+          </p:cNvPr>
+          <p:cNvSpPr txBox="1"/>
+          <p:nvPr/>
+        </p:nvSpPr>
+        <p:spPr>
+          <a:xfrm>
+            <a:off x="0" y="58846"/>
+            <a:ext cx="7113494" cy="6740307"/>
+          </a:xfrm>
+          <a:prstGeom prst="rect">
+            <a:avLst/>
+          </a:prstGeom>
+          <a:noFill/>
+        </p:spPr>
+        <p:txBody>
+          <a:bodyPr wrap="square" rtlCol="0">
+            <a:spAutoFit/>
+          </a:bodyPr>
+          <a:lstStyle/>
+          <a:p>
+            <a:r>
+              <a:rPr lang="en-US" sz="2400" b="1" dirty="0"/>
+              <a:t>Azure ML : Some Links</a:t>
+            </a:r>
+            <a:endParaRPr lang="en-US" sz="1200" dirty="0"/>
+          </a:p>
+          <a:p>
+            <a:endParaRPr lang="en-US" sz="1200" dirty="0"/>
+          </a:p>
+          <a:p>
+            <a:r>
+              <a:rPr lang="en-US" sz="1200" dirty="0"/>
+              <a:t>Here is a very good post on training using </a:t>
+            </a:r>
+            <a:r>
+              <a:rPr lang="en-US" sz="1200" dirty="0" err="1"/>
+              <a:t>sklearn</a:t>
+            </a:r>
+            <a:r>
+              <a:rPr lang="en-US" sz="1200" dirty="0"/>
+              <a:t> – and then register the model in ML Studio:</a:t>
+            </a:r>
+          </a:p>
+          <a:p>
+            <a:r>
+              <a:rPr lang="en-US" sz="1200" dirty="0">
+                <a:hlinkClick r:id="rId2"/>
+              </a:rPr>
+              <a:t>https://towardsdatascience.com/deploying-ml-models-on-azure-a948c106f7b5</a:t>
+            </a:r>
+            <a:r>
+              <a:rPr lang="en-US" sz="1200" dirty="0"/>
+              <a:t> </a:t>
+            </a:r>
+          </a:p>
+          <a:p>
+            <a:r>
+              <a:rPr lang="en-US" sz="1200" dirty="0"/>
+              <a:t>or</a:t>
+            </a:r>
+          </a:p>
+          <a:p>
+            <a:r>
+              <a:rPr lang="en-US" sz="1200" dirty="0">
+                <a:hlinkClick r:id="rId3"/>
+              </a:rPr>
+              <a:t>https://ai.plainenglish.io/deploying-ml-models-on-azure-8daa9c10db5a</a:t>
+            </a:r>
+            <a:r>
+              <a:rPr lang="en-US" sz="1200" dirty="0"/>
+              <a:t> </a:t>
+            </a:r>
+          </a:p>
+          <a:p>
+            <a:endParaRPr lang="en-US" sz="1200" dirty="0"/>
+          </a:p>
+          <a:p>
+            <a:r>
+              <a:rPr lang="en-US" sz="1200" dirty="0"/>
+              <a:t>This above tutorial doesn't actually "deploy" the model.</a:t>
+            </a:r>
+          </a:p>
+          <a:p>
+            <a:r>
+              <a:rPr lang="en-US" sz="1200" dirty="0"/>
+              <a:t>The more appropriate title should be "</a:t>
+            </a:r>
+            <a:r>
+              <a:rPr lang="en-US" sz="1200" b="1" dirty="0">
+                <a:solidFill>
+                  <a:srgbClr val="00B050"/>
+                </a:solidFill>
+              </a:rPr>
+              <a:t>Register your custom python model in ML Studio</a:t>
+            </a:r>
+            <a:r>
+              <a:rPr lang="en-US" sz="1200" dirty="0"/>
+              <a:t>"</a:t>
+            </a:r>
+          </a:p>
+          <a:p>
+            <a:r>
+              <a:rPr lang="en-US" sz="1200" dirty="0"/>
+              <a:t>Note</a:t>
+            </a:r>
+          </a:p>
+          <a:p>
+            <a:r>
+              <a:rPr lang="en-US" sz="1200" dirty="0"/>
+              <a:t>The author uses specific library to store the model into pickle:</a:t>
+            </a:r>
+          </a:p>
+          <a:p>
+            <a:r>
+              <a:rPr lang="en-US" sz="1200" dirty="0"/>
+              <a:t> </a:t>
+            </a:r>
+          </a:p>
+          <a:p>
+            <a:r>
+              <a:rPr lang="en-US" sz="1200" dirty="0">
+                <a:solidFill>
+                  <a:srgbClr val="0070C0"/>
+                </a:solidFill>
+                <a:latin typeface="Menlo" panose="020B0609030804020204" pitchFamily="49" charset="0"/>
+                <a:ea typeface="Menlo" panose="020B0609030804020204" pitchFamily="49" charset="0"/>
+                <a:cs typeface="Menlo" panose="020B0609030804020204" pitchFamily="49" charset="0"/>
+              </a:rPr>
+              <a:t>from </a:t>
+            </a:r>
+            <a:r>
+              <a:rPr lang="en-US" sz="1200" dirty="0" err="1">
+                <a:solidFill>
+                  <a:srgbClr val="0070C0"/>
+                </a:solidFill>
+                <a:latin typeface="Menlo" panose="020B0609030804020204" pitchFamily="49" charset="0"/>
+                <a:ea typeface="Menlo" panose="020B0609030804020204" pitchFamily="49" charset="0"/>
+                <a:cs typeface="Menlo" panose="020B0609030804020204" pitchFamily="49" charset="0"/>
+              </a:rPr>
+              <a:t>sklearn.externals</a:t>
+            </a:r>
+            <a:r>
+              <a:rPr lang="en-US" sz="1200" dirty="0">
+                <a:solidFill>
+                  <a:srgbClr val="0070C0"/>
+                </a:solidFill>
+                <a:latin typeface="Menlo" panose="020B0609030804020204" pitchFamily="49" charset="0"/>
+                <a:ea typeface="Menlo" panose="020B0609030804020204" pitchFamily="49" charset="0"/>
+                <a:cs typeface="Menlo" panose="020B0609030804020204" pitchFamily="49" charset="0"/>
+              </a:rPr>
+              <a:t> import </a:t>
+            </a:r>
+            <a:r>
+              <a:rPr lang="en-US" sz="1200" dirty="0" err="1">
+                <a:solidFill>
+                  <a:srgbClr val="0070C0"/>
+                </a:solidFill>
+                <a:latin typeface="Menlo" panose="020B0609030804020204" pitchFamily="49" charset="0"/>
+                <a:ea typeface="Menlo" panose="020B0609030804020204" pitchFamily="49" charset="0"/>
+                <a:cs typeface="Menlo" panose="020B0609030804020204" pitchFamily="49" charset="0"/>
+              </a:rPr>
+              <a:t>joblib</a:t>
+            </a:r>
+            <a:endParaRPr lang="en-US" sz="1200" dirty="0">
+              <a:solidFill>
+                <a:srgbClr val="0070C0"/>
+              </a:solidFill>
+              <a:latin typeface="Menlo" panose="020B0609030804020204" pitchFamily="49" charset="0"/>
+              <a:ea typeface="Menlo" panose="020B0609030804020204" pitchFamily="49" charset="0"/>
+              <a:cs typeface="Menlo" panose="020B0609030804020204" pitchFamily="49" charset="0"/>
+            </a:endParaRPr>
+          </a:p>
+          <a:p>
+            <a:r>
+              <a:rPr lang="en-US" sz="1200" dirty="0" err="1">
+                <a:solidFill>
+                  <a:srgbClr val="0070C0"/>
+                </a:solidFill>
+                <a:latin typeface="Menlo" panose="020B0609030804020204" pitchFamily="49" charset="0"/>
+                <a:ea typeface="Menlo" panose="020B0609030804020204" pitchFamily="49" charset="0"/>
+                <a:cs typeface="Menlo" panose="020B0609030804020204" pitchFamily="49" charset="0"/>
+              </a:rPr>
+              <a:t>joblib.dump</a:t>
+            </a:r>
+            <a:r>
+              <a:rPr lang="en-US" sz="1200" dirty="0">
+                <a:solidFill>
+                  <a:srgbClr val="0070C0"/>
+                </a:solidFill>
+                <a:latin typeface="Menlo" panose="020B0609030804020204" pitchFamily="49" charset="0"/>
+                <a:ea typeface="Menlo" panose="020B0609030804020204" pitchFamily="49" charset="0"/>
+                <a:cs typeface="Menlo" panose="020B0609030804020204" pitchFamily="49" charset="0"/>
+              </a:rPr>
+              <a:t>(value=</a:t>
+            </a:r>
+            <a:r>
+              <a:rPr lang="en-US" sz="1200" dirty="0" err="1">
+                <a:solidFill>
+                  <a:srgbClr val="0070C0"/>
+                </a:solidFill>
+                <a:latin typeface="Menlo" panose="020B0609030804020204" pitchFamily="49" charset="0"/>
+                <a:ea typeface="Menlo" panose="020B0609030804020204" pitchFamily="49" charset="0"/>
+                <a:cs typeface="Menlo" panose="020B0609030804020204" pitchFamily="49" charset="0"/>
+              </a:rPr>
+              <a:t>mymodel</a:t>
+            </a:r>
+            <a:r>
+              <a:rPr lang="en-US" sz="1200" dirty="0">
+                <a:solidFill>
+                  <a:srgbClr val="0070C0"/>
+                </a:solidFill>
+                <a:latin typeface="Menlo" panose="020B0609030804020204" pitchFamily="49" charset="0"/>
+                <a:ea typeface="Menlo" panose="020B0609030804020204" pitchFamily="49" charset="0"/>
+                <a:cs typeface="Menlo" panose="020B0609030804020204" pitchFamily="49" charset="0"/>
+              </a:rPr>
+              <a:t>, filename="</a:t>
+            </a:r>
+            <a:r>
+              <a:rPr lang="en-US" sz="1200" dirty="0" err="1">
+                <a:solidFill>
+                  <a:srgbClr val="0070C0"/>
+                </a:solidFill>
+                <a:latin typeface="Menlo" panose="020B0609030804020204" pitchFamily="49" charset="0"/>
+                <a:ea typeface="Menlo" panose="020B0609030804020204" pitchFamily="49" charset="0"/>
+                <a:cs typeface="Menlo" panose="020B0609030804020204" pitchFamily="49" charset="0"/>
+              </a:rPr>
+              <a:t>mymodel.pkl</a:t>
+            </a:r>
+            <a:r>
+              <a:rPr lang="en-US" sz="1200" dirty="0">
+                <a:solidFill>
+                  <a:srgbClr val="0070C0"/>
+                </a:solidFill>
+                <a:latin typeface="Menlo" panose="020B0609030804020204" pitchFamily="49" charset="0"/>
+                <a:ea typeface="Menlo" panose="020B0609030804020204" pitchFamily="49" charset="0"/>
+                <a:cs typeface="Menlo" panose="020B0609030804020204" pitchFamily="49" charset="0"/>
+              </a:rPr>
+              <a:t>")</a:t>
+            </a:r>
+          </a:p>
+          <a:p>
+            <a:r>
+              <a:rPr lang="en-US" sz="1200" dirty="0"/>
+              <a:t> </a:t>
+            </a:r>
+          </a:p>
+          <a:p>
+            <a:r>
+              <a:rPr lang="en-US" sz="1200" dirty="0"/>
+              <a:t>and then:</a:t>
+            </a:r>
+          </a:p>
+          <a:p>
+            <a:r>
+              <a:rPr lang="en-US" sz="1200" dirty="0"/>
+              <a:t> </a:t>
+            </a:r>
+          </a:p>
+          <a:p>
+            <a:r>
+              <a:rPr lang="en-US" sz="1200" dirty="0">
+                <a:solidFill>
+                  <a:srgbClr val="0070C0"/>
+                </a:solidFill>
+                <a:latin typeface="Menlo" panose="020B0609030804020204" pitchFamily="49" charset="0"/>
+                <a:ea typeface="Menlo" panose="020B0609030804020204" pitchFamily="49" charset="0"/>
+                <a:cs typeface="Menlo" panose="020B0609030804020204" pitchFamily="49" charset="0"/>
+              </a:rPr>
+              <a:t>from </a:t>
+            </a:r>
+            <a:r>
+              <a:rPr lang="en-US" sz="1200" dirty="0" err="1">
+                <a:solidFill>
+                  <a:srgbClr val="0070C0"/>
+                </a:solidFill>
+                <a:latin typeface="Menlo" panose="020B0609030804020204" pitchFamily="49" charset="0"/>
+                <a:ea typeface="Menlo" panose="020B0609030804020204" pitchFamily="49" charset="0"/>
+                <a:cs typeface="Menlo" panose="020B0609030804020204" pitchFamily="49" charset="0"/>
+              </a:rPr>
+              <a:t>azureml.core.model</a:t>
+            </a:r>
+            <a:r>
+              <a:rPr lang="en-US" sz="1200" dirty="0">
+                <a:solidFill>
+                  <a:srgbClr val="0070C0"/>
+                </a:solidFill>
+                <a:latin typeface="Menlo" panose="020B0609030804020204" pitchFamily="49" charset="0"/>
+                <a:ea typeface="Menlo" panose="020B0609030804020204" pitchFamily="49" charset="0"/>
+                <a:cs typeface="Menlo" panose="020B0609030804020204" pitchFamily="49" charset="0"/>
+              </a:rPr>
+              <a:t> import Model</a:t>
+            </a:r>
+          </a:p>
+          <a:p>
+            <a:r>
+              <a:rPr lang="en-US" sz="1200" dirty="0">
+                <a:solidFill>
+                  <a:srgbClr val="0070C0"/>
+                </a:solidFill>
+                <a:latin typeface="Menlo" panose="020B0609030804020204" pitchFamily="49" charset="0"/>
+                <a:ea typeface="Menlo" panose="020B0609030804020204" pitchFamily="49" charset="0"/>
+                <a:cs typeface="Menlo" panose="020B0609030804020204" pitchFamily="49" charset="0"/>
+              </a:rPr>
+              <a:t>model = </a:t>
+            </a:r>
+            <a:r>
+              <a:rPr lang="en-US" sz="1200" dirty="0" err="1">
+                <a:solidFill>
+                  <a:srgbClr val="0070C0"/>
+                </a:solidFill>
+                <a:latin typeface="Menlo" panose="020B0609030804020204" pitchFamily="49" charset="0"/>
+                <a:ea typeface="Menlo" panose="020B0609030804020204" pitchFamily="49" charset="0"/>
+                <a:cs typeface="Menlo" panose="020B0609030804020204" pitchFamily="49" charset="0"/>
+              </a:rPr>
+              <a:t>Model.register</a:t>
+            </a:r>
+            <a:r>
+              <a:rPr lang="en-US" sz="1200" dirty="0">
+                <a:solidFill>
+                  <a:srgbClr val="0070C0"/>
+                </a:solidFill>
+                <a:latin typeface="Menlo" panose="020B0609030804020204" pitchFamily="49" charset="0"/>
+                <a:ea typeface="Menlo" panose="020B0609030804020204" pitchFamily="49" charset="0"/>
+                <a:cs typeface="Menlo" panose="020B0609030804020204" pitchFamily="49" charset="0"/>
+              </a:rPr>
+              <a:t>(</a:t>
+            </a:r>
+          </a:p>
+          <a:p>
+            <a:r>
+              <a:rPr lang="en-US" sz="1200" dirty="0">
+                <a:solidFill>
+                  <a:srgbClr val="0070C0"/>
+                </a:solidFill>
+                <a:latin typeface="Menlo" panose="020B0609030804020204" pitchFamily="49" charset="0"/>
+                <a:ea typeface="Menlo" panose="020B0609030804020204" pitchFamily="49" charset="0"/>
+                <a:cs typeface="Menlo" panose="020B0609030804020204" pitchFamily="49" charset="0"/>
+              </a:rPr>
+              <a:t>    workspace=</a:t>
+            </a:r>
+            <a:r>
+              <a:rPr lang="en-US" sz="1200" dirty="0" err="1">
+                <a:solidFill>
+                  <a:srgbClr val="0070C0"/>
+                </a:solidFill>
+                <a:latin typeface="Menlo" panose="020B0609030804020204" pitchFamily="49" charset="0"/>
+                <a:ea typeface="Menlo" panose="020B0609030804020204" pitchFamily="49" charset="0"/>
+                <a:cs typeface="Menlo" panose="020B0609030804020204" pitchFamily="49" charset="0"/>
+              </a:rPr>
+              <a:t>ws</a:t>
+            </a:r>
+            <a:r>
+              <a:rPr lang="en-US" sz="1200" dirty="0">
+                <a:solidFill>
+                  <a:srgbClr val="0070C0"/>
+                </a:solidFill>
+                <a:latin typeface="Menlo" panose="020B0609030804020204" pitchFamily="49" charset="0"/>
+                <a:ea typeface="Menlo" panose="020B0609030804020204" pitchFamily="49" charset="0"/>
+                <a:cs typeface="Menlo" panose="020B0609030804020204" pitchFamily="49" charset="0"/>
+              </a:rPr>
+              <a:t>,</a:t>
+            </a:r>
+          </a:p>
+          <a:p>
+            <a:r>
+              <a:rPr lang="en-US" sz="1200" dirty="0">
+                <a:solidFill>
+                  <a:srgbClr val="0070C0"/>
+                </a:solidFill>
+                <a:latin typeface="Menlo" panose="020B0609030804020204" pitchFamily="49" charset="0"/>
+                <a:ea typeface="Menlo" panose="020B0609030804020204" pitchFamily="49" charset="0"/>
+                <a:cs typeface="Menlo" panose="020B0609030804020204" pitchFamily="49" charset="0"/>
+              </a:rPr>
+              <a:t>    </a:t>
+            </a:r>
+            <a:r>
+              <a:rPr lang="en-US" sz="1200" dirty="0" err="1">
+                <a:solidFill>
+                  <a:srgbClr val="0070C0"/>
+                </a:solidFill>
+                <a:latin typeface="Menlo" panose="020B0609030804020204" pitchFamily="49" charset="0"/>
+                <a:ea typeface="Menlo" panose="020B0609030804020204" pitchFamily="49" charset="0"/>
+                <a:cs typeface="Menlo" panose="020B0609030804020204" pitchFamily="49" charset="0"/>
+              </a:rPr>
+              <a:t>model_path</a:t>
+            </a:r>
+            <a:r>
+              <a:rPr lang="en-US" sz="1200" dirty="0">
+                <a:solidFill>
+                  <a:srgbClr val="0070C0"/>
+                </a:solidFill>
+                <a:latin typeface="Menlo" panose="020B0609030804020204" pitchFamily="49" charset="0"/>
+                <a:ea typeface="Menlo" panose="020B0609030804020204" pitchFamily="49" charset="0"/>
+                <a:cs typeface="Menlo" panose="020B0609030804020204" pitchFamily="49" charset="0"/>
+              </a:rPr>
+              <a:t>="</a:t>
+            </a:r>
+            <a:r>
+              <a:rPr lang="en-US" sz="1200" dirty="0" err="1">
+                <a:solidFill>
+                  <a:srgbClr val="0070C0"/>
+                </a:solidFill>
+                <a:latin typeface="Menlo" panose="020B0609030804020204" pitchFamily="49" charset="0"/>
+                <a:ea typeface="Menlo" panose="020B0609030804020204" pitchFamily="49" charset="0"/>
+                <a:cs typeface="Menlo" panose="020B0609030804020204" pitchFamily="49" charset="0"/>
+              </a:rPr>
+              <a:t>mymodel.pkl</a:t>
+            </a:r>
+            <a:r>
+              <a:rPr lang="en-US" sz="1200" dirty="0">
+                <a:solidFill>
+                  <a:srgbClr val="0070C0"/>
+                </a:solidFill>
+                <a:latin typeface="Menlo" panose="020B0609030804020204" pitchFamily="49" charset="0"/>
+                <a:ea typeface="Menlo" panose="020B0609030804020204" pitchFamily="49" charset="0"/>
+                <a:cs typeface="Menlo" panose="020B0609030804020204" pitchFamily="49" charset="0"/>
+              </a:rPr>
+              <a:t>",</a:t>
+            </a:r>
+          </a:p>
+          <a:p>
+            <a:r>
+              <a:rPr lang="en-US" sz="1200" dirty="0">
+                <a:solidFill>
+                  <a:srgbClr val="0070C0"/>
+                </a:solidFill>
+                <a:latin typeface="Menlo" panose="020B0609030804020204" pitchFamily="49" charset="0"/>
+                <a:ea typeface="Menlo" panose="020B0609030804020204" pitchFamily="49" charset="0"/>
+                <a:cs typeface="Menlo" panose="020B0609030804020204" pitchFamily="49" charset="0"/>
+              </a:rPr>
+              <a:t>    </a:t>
+            </a:r>
+            <a:r>
+              <a:rPr lang="en-US" sz="1200" dirty="0" err="1">
+                <a:solidFill>
+                  <a:srgbClr val="0070C0"/>
+                </a:solidFill>
+                <a:latin typeface="Menlo" panose="020B0609030804020204" pitchFamily="49" charset="0"/>
+                <a:ea typeface="Menlo" panose="020B0609030804020204" pitchFamily="49" charset="0"/>
+                <a:cs typeface="Menlo" panose="020B0609030804020204" pitchFamily="49" charset="0"/>
+              </a:rPr>
+              <a:t>model_name</a:t>
+            </a:r>
+            <a:r>
+              <a:rPr lang="en-US" sz="1200" dirty="0">
+                <a:solidFill>
+                  <a:srgbClr val="0070C0"/>
+                </a:solidFill>
+                <a:latin typeface="Menlo" panose="020B0609030804020204" pitchFamily="49" charset="0"/>
+                <a:ea typeface="Menlo" panose="020B0609030804020204" pitchFamily="49" charset="0"/>
+                <a:cs typeface="Menlo" panose="020B0609030804020204" pitchFamily="49" charset="0"/>
+              </a:rPr>
+              <a:t>="</a:t>
+            </a:r>
+            <a:r>
+              <a:rPr lang="en-US" sz="1200" dirty="0" err="1">
+                <a:solidFill>
+                  <a:srgbClr val="0070C0"/>
+                </a:solidFill>
+                <a:latin typeface="Menlo" panose="020B0609030804020204" pitchFamily="49" charset="0"/>
+                <a:ea typeface="Menlo" panose="020B0609030804020204" pitchFamily="49" charset="0"/>
+                <a:cs typeface="Menlo" panose="020B0609030804020204" pitchFamily="49" charset="0"/>
+              </a:rPr>
+              <a:t>boston_housing_lr</a:t>
+            </a:r>
+            <a:r>
+              <a:rPr lang="en-US" sz="1200" dirty="0">
+                <a:solidFill>
+                  <a:srgbClr val="0070C0"/>
+                </a:solidFill>
+                <a:latin typeface="Menlo" panose="020B0609030804020204" pitchFamily="49" charset="0"/>
+                <a:ea typeface="Menlo" panose="020B0609030804020204" pitchFamily="49" charset="0"/>
+                <a:cs typeface="Menlo" panose="020B0609030804020204" pitchFamily="49" charset="0"/>
+              </a:rPr>
+              <a:t>")</a:t>
+            </a:r>
+          </a:p>
+          <a:p>
+            <a:r>
+              <a:rPr lang="en-US" sz="1200" dirty="0"/>
+              <a:t> </a:t>
+            </a:r>
+          </a:p>
+          <a:p>
+            <a:r>
+              <a:rPr lang="en-US" sz="1200" dirty="0"/>
+              <a:t>Then you can use the second tutorial:</a:t>
+            </a:r>
+          </a:p>
+          <a:p>
+            <a:r>
+              <a:rPr lang="en-US" sz="1200" dirty="0">
+                <a:hlinkClick r:id="rId4"/>
+              </a:rPr>
+              <a:t>https://docs.microsoft.com/en-us/azure/machine-learning/how-to-deploy-and-where?tabs=azcli#script</a:t>
+            </a:r>
+            <a:r>
+              <a:rPr lang="en-US" sz="1200" dirty="0"/>
+              <a:t> </a:t>
+            </a:r>
+          </a:p>
+          <a:p>
+            <a:endParaRPr lang="en-US" sz="1200" dirty="0"/>
+          </a:p>
+          <a:p>
+            <a:r>
+              <a:rPr lang="en-US" sz="1200" dirty="0"/>
+              <a:t>which shows how to deploy the model.</a:t>
+            </a:r>
+          </a:p>
+          <a:p>
+            <a:r>
+              <a:rPr lang="en-US" sz="1200" dirty="0"/>
+              <a:t>For this deployment you will need to write the "</a:t>
+            </a:r>
+            <a:r>
+              <a:rPr lang="en-US" sz="1200" b="1" dirty="0">
+                <a:solidFill>
+                  <a:srgbClr val="00B050"/>
+                </a:solidFill>
+              </a:rPr>
+              <a:t>entry script</a:t>
+            </a:r>
+            <a:r>
+              <a:rPr lang="en-US" sz="1200" dirty="0"/>
+              <a:t>"</a:t>
+            </a:r>
+          </a:p>
+          <a:p>
+            <a:r>
+              <a:rPr lang="en-US" sz="1200" dirty="0"/>
+              <a:t> </a:t>
+            </a:r>
+          </a:p>
+          <a:p>
+            <a:r>
+              <a:rPr lang="en-US" sz="1200" dirty="0"/>
+              <a:t>which has to have two methods: </a:t>
+            </a:r>
+          </a:p>
+          <a:p>
+            <a:r>
+              <a:rPr lang="en-US" sz="1200" dirty="0"/>
+              <a:t>   </a:t>
+            </a:r>
+            <a:r>
+              <a:rPr lang="en-US" sz="1200" b="1" dirty="0" err="1">
+                <a:solidFill>
+                  <a:srgbClr val="00B050"/>
+                </a:solidFill>
+              </a:rPr>
+              <a:t>init</a:t>
+            </a:r>
+            <a:r>
+              <a:rPr lang="en-US" sz="1200" b="1" dirty="0">
+                <a:solidFill>
+                  <a:srgbClr val="00B050"/>
+                </a:solidFill>
+              </a:rPr>
+              <a:t>() and run()</a:t>
+            </a:r>
+          </a:p>
+          <a:p>
+            <a:r>
+              <a:rPr lang="en-US" sz="1200" dirty="0"/>
+              <a:t> </a:t>
+            </a:r>
+          </a:p>
+          <a:p>
+            <a:r>
+              <a:rPr lang="en-US" sz="1200" dirty="0"/>
+              <a:t>Once you have this script, you can go to your models (in ML Studio), </a:t>
+            </a:r>
+          </a:p>
+          <a:p>
+            <a:r>
+              <a:rPr lang="en-US" sz="1200" dirty="0"/>
+              <a:t>click on your model, then click on "Deploy" on top, </a:t>
+            </a:r>
+          </a:p>
+          <a:p>
+            <a:r>
+              <a:rPr lang="en-US" sz="1200" dirty="0"/>
+              <a:t>fill-in parameters (name, ... , entry script, ...) - and click the button to deploy it </a:t>
+            </a:r>
+          </a:p>
+        </p:txBody>
+      </p:sp>
+    </p:spTree>
+    <p:extLst>
+      <p:ext uri="{BB962C8B-B14F-4D97-AF65-F5344CB8AC3E}">
+        <p14:creationId xmlns:p14="http://schemas.microsoft.com/office/powerpoint/2010/main" val="23045177"/>
+      </p:ext>
+    </p:extLst>
+  </p:cSld>
+  <p:clrMapOvr>
+    <a:masterClrMapping/>
+  </p:clrMapOvr>
+</p:sld>
+</file>
+
+<file path=ppt/slides/slide4.xml><?xml version="1.0" encoding="utf-8"?>
+<p:sld xmlns:a="http://schemas.openxmlformats.org/drawingml/2006/main" xmlns:r="http://schemas.openxmlformats.org/officeDocument/2006/relationships" xmlns:p="http://schemas.openxmlformats.org/presentationml/2006/main">
+  <p:cSld>
+    <p:spTree>
+      <p:nvGrpSpPr>
+        <p:cNvPr id="1" name=""/>
+        <p:cNvGrpSpPr/>
+        <p:nvPr/>
+      </p:nvGrpSpPr>
+      <p:grpSpPr>
+        <a:xfrm>
+          <a:off x="0" y="0"/>
+          <a:ext cx="0" cy="0"/>
+          <a:chOff x="0" y="0"/>
+          <a:chExt cx="0" cy="0"/>
+        </a:xfrm>
+      </p:grpSpPr>
+      <p:sp>
+        <p:nvSpPr>
+          <p:cNvPr id="7" name="TextBox 6">
+            <a:extLst>
+              <a:ext uri="{FF2B5EF4-FFF2-40B4-BE49-F238E27FC236}">
+                <a16:creationId xmlns:a16="http://schemas.microsoft.com/office/drawing/2014/main" id="{7384ECF0-3C64-8241-99B2-0AA612206F2C}"/>
+              </a:ext>
+            </a:extLst>
+          </p:cNvPr>
+          <p:cNvSpPr txBox="1"/>
+          <p:nvPr/>
+        </p:nvSpPr>
+        <p:spPr>
+          <a:xfrm>
+            <a:off x="0" y="58846"/>
+            <a:ext cx="11338560" cy="2862322"/>
+          </a:xfrm>
+          <a:prstGeom prst="rect">
+            <a:avLst/>
+          </a:prstGeom>
+          <a:noFill/>
+        </p:spPr>
+        <p:txBody>
+          <a:bodyPr wrap="square" rtlCol="0">
+            <a:spAutoFit/>
+          </a:bodyPr>
+          <a:lstStyle/>
+          <a:p>
+            <a:r>
+              <a:rPr lang="en-US" sz="2400" b="1" dirty="0"/>
+              <a:t>Azure ML : Some Links</a:t>
+            </a:r>
+            <a:endParaRPr lang="en-US" sz="1200" dirty="0"/>
+          </a:p>
+          <a:p>
+            <a:endParaRPr lang="en-US" sz="1200" dirty="0"/>
+          </a:p>
+          <a:p>
+            <a:r>
+              <a:rPr lang="en-US" sz="1200" dirty="0"/>
+              <a:t>Good </a:t>
+            </a:r>
+            <a:r>
+              <a:rPr lang="en-US" sz="1200" dirty="0" err="1"/>
+              <a:t>youtube</a:t>
+            </a:r>
+            <a:r>
+              <a:rPr lang="en-US" sz="1200" dirty="0"/>
+              <a:t> video "Train and deploy ML models at scale using Azure Machine Learning | INT134C"  - </a:t>
+            </a:r>
+          </a:p>
+          <a:p>
+            <a:r>
+              <a:rPr lang="en-US" sz="1200" dirty="0"/>
+              <a:t>- </a:t>
+            </a:r>
+            <a:r>
+              <a:rPr lang="en-US" sz="1200" u="sng" dirty="0">
+                <a:hlinkClick r:id="rId2" tooltip="https://www.youtube.com/watch?v=2ogbxycnvgk"/>
+              </a:rPr>
+              <a:t>https://www.youtube.com/watch?v=2OgBxYCnVGk</a:t>
+            </a:r>
+            <a:r>
+              <a:rPr lang="en-US" sz="1200" dirty="0"/>
+              <a:t> </a:t>
+            </a:r>
+          </a:p>
+          <a:p>
+            <a:endParaRPr lang="en-US" sz="1200" dirty="0"/>
+          </a:p>
+          <a:p>
+            <a:r>
+              <a:rPr lang="en-US" sz="1200" dirty="0"/>
+              <a:t>And here is the link from this video to a good 10-hrs course: "Build AI solutions with Azure Machine Learning" - 10 </a:t>
+            </a:r>
+            <a:r>
+              <a:rPr lang="en-US" sz="1200" dirty="0" err="1"/>
+              <a:t>hrs</a:t>
+            </a:r>
+            <a:r>
+              <a:rPr lang="en-US" sz="1200" dirty="0"/>
+              <a:t> - </a:t>
+            </a:r>
+            <a:br>
+              <a:rPr lang="en-US" sz="1200" dirty="0"/>
+            </a:br>
+            <a:r>
+              <a:rPr lang="en-US" sz="1200" dirty="0"/>
+              <a:t> - </a:t>
+            </a:r>
+            <a:r>
+              <a:rPr lang="en-US" sz="1200" u="sng" dirty="0">
+                <a:hlinkClick r:id="rId3" tooltip="https://docs.microsoft.com/en-us/learn/paths/build-ai-solutions-with-azure-ml-service/"/>
+              </a:rPr>
+              <a:t>https://docs.microsoft.com/en-us/learn/paths/build-ai-solutions-with-azure-ml-service/</a:t>
+            </a:r>
+            <a:endParaRPr lang="en-US" sz="1200" dirty="0"/>
+          </a:p>
+          <a:p>
+            <a:endParaRPr lang="en-US" sz="1200" dirty="0"/>
+          </a:p>
+          <a:p>
+            <a:r>
+              <a:rPr lang="en-US" sz="1200" dirty="0"/>
+              <a:t>Yet another good tutorial - "Creating End-to-End </a:t>
+            </a:r>
+            <a:r>
+              <a:rPr lang="en-US" sz="1200" dirty="0" err="1"/>
+              <a:t>MLOps</a:t>
+            </a:r>
+            <a:r>
+              <a:rPr lang="en-US" sz="1200" dirty="0"/>
+              <a:t> pipelines:</a:t>
+            </a:r>
+            <a:br>
+              <a:rPr lang="en-US" sz="1200" dirty="0"/>
+            </a:br>
+            <a:r>
+              <a:rPr lang="en-US" sz="1200" dirty="0"/>
+              <a:t> - </a:t>
+            </a:r>
+            <a:r>
+              <a:rPr lang="en-US" sz="1200" u="sng" dirty="0">
+                <a:hlinkClick r:id="rId4"/>
+              </a:rPr>
+              <a:t>https://benalexkeen.com/creating-end-to-end-mlops-pipelines-using-azure-ml-and-azure-pipelines-part-1/</a:t>
+            </a:r>
+            <a:endParaRPr lang="en-US" sz="1200" dirty="0"/>
+          </a:p>
+          <a:p>
+            <a:endParaRPr lang="en-US" sz="1200" dirty="0"/>
+          </a:p>
+          <a:p>
+            <a:r>
+              <a:rPr lang="en-US" sz="1200" dirty="0"/>
+              <a:t>Also:</a:t>
+            </a:r>
+          </a:p>
+          <a:p>
+            <a:r>
+              <a:rPr lang="en-US" sz="1200" dirty="0">
+                <a:hlinkClick r:id="rId5"/>
+              </a:rPr>
+              <a:t>https://docs.microsoft.com/en-us/azure/machine-learning/</a:t>
+            </a:r>
+            <a:r>
+              <a:rPr lang="en-US" sz="1200" dirty="0"/>
+              <a:t> </a:t>
+            </a:r>
+          </a:p>
+          <a:p>
+            <a:endParaRPr lang="en-US" sz="1200" dirty="0"/>
+          </a:p>
+        </p:txBody>
+      </p:sp>
+    </p:spTree>
+    <p:extLst>
+      <p:ext uri="{BB962C8B-B14F-4D97-AF65-F5344CB8AC3E}">
+        <p14:creationId xmlns:p14="http://schemas.microsoft.com/office/powerpoint/2010/main" val="2218277181"/>
+      </p:ext>
+    </p:extLst>
+  </p:cSld>
+  <p:clrMapOvr>
+    <a:masterClrMapping/>
+  </p:clrMapOvr>
+</p:sld>
+</file>
+
+<file path=ppt/slides/slide5.xml><?xml version="1.0" encoding="utf-8"?>
+<p:sld xmlns:a="http://schemas.openxmlformats.org/drawingml/2006/main" xmlns:r="http://schemas.openxmlformats.org/officeDocument/2006/relationships" xmlns:p="http://schemas.openxmlformats.org/presentationml/2006/main">
+  <p:cSld>
+    <p:spTree>
+      <p:nvGrpSpPr>
+        <p:cNvPr id="1" name=""/>
+        <p:cNvGrpSpPr/>
+        <p:nvPr/>
+      </p:nvGrpSpPr>
+      <p:grpSpPr>
+        <a:xfrm>
+          <a:off x="0" y="0"/>
+          <a:ext cx="0" cy="0"/>
+          <a:chOff x="0" y="0"/>
+          <a:chExt cx="0" cy="0"/>
+        </a:xfrm>
+      </p:grpSpPr>
+      <p:sp>
+        <p:nvSpPr>
+          <p:cNvPr id="7" name="TextBox 6">
+            <a:extLst>
+              <a:ext uri="{FF2B5EF4-FFF2-40B4-BE49-F238E27FC236}">
+                <a16:creationId xmlns:a16="http://schemas.microsoft.com/office/drawing/2014/main" id="{7384ECF0-3C64-8241-99B2-0AA612206F2C}"/>
+              </a:ext>
+            </a:extLst>
+          </p:cNvPr>
+          <p:cNvSpPr txBox="1"/>
+          <p:nvPr/>
+        </p:nvSpPr>
+        <p:spPr>
+          <a:xfrm>
+            <a:off x="0" y="58846"/>
+            <a:ext cx="11338560" cy="5632311"/>
+          </a:xfrm>
+          <a:prstGeom prst="rect">
+            <a:avLst/>
+          </a:prstGeom>
+          <a:noFill/>
+        </p:spPr>
+        <p:txBody>
+          <a:bodyPr wrap="square" rtlCol="0">
+            <a:spAutoFit/>
+          </a:bodyPr>
+          <a:lstStyle/>
+          <a:p>
+            <a:r>
+              <a:rPr lang="en-US" sz="2400" b="1" dirty="0"/>
+              <a:t>Azure ML : More Links</a:t>
+            </a:r>
+            <a:endParaRPr lang="en-US" sz="1200" dirty="0"/>
+          </a:p>
+          <a:p>
+            <a:endParaRPr lang="en-US" sz="1200" dirty="0"/>
+          </a:p>
+          <a:p>
+            <a:r>
+              <a:rPr lang="en-US" sz="1200" dirty="0"/>
+              <a:t>Google-</a:t>
+            </a:r>
+            <a:r>
+              <a:rPr lang="en-US" sz="1200" dirty="0" err="1"/>
+              <a:t>ing</a:t>
+            </a:r>
+            <a:r>
+              <a:rPr lang="en-US" sz="1200" dirty="0"/>
+              <a:t> mount datastore azure ml notebook - </a:t>
+            </a:r>
+          </a:p>
+          <a:p>
+            <a:r>
+              <a:rPr lang="en-US" sz="1200" dirty="0"/>
+              <a:t> - </a:t>
+            </a:r>
+            <a:r>
+              <a:rPr lang="en-US" sz="1200" u="sng" dirty="0">
+                <a:hlinkClick r:id="rId2"/>
+              </a:rPr>
+              <a:t>https://github.com/microsoft/MLOpsPython</a:t>
+            </a:r>
+            <a:r>
+              <a:rPr lang="en-US" sz="1200" dirty="0"/>
+              <a:t> </a:t>
+            </a:r>
+          </a:p>
+          <a:p>
+            <a:r>
+              <a:rPr lang="en-US" sz="1200" dirty="0"/>
+              <a:t> - </a:t>
+            </a:r>
+            <a:r>
+              <a:rPr lang="en-US" sz="1200" u="sng" dirty="0">
+                <a:hlinkClick r:id="rId3"/>
+              </a:rPr>
+              <a:t>https://docs.microsoft.com/en-us/python/api/azureml-core/azureml.core.datastore?view=azure-ml-py</a:t>
+            </a:r>
+            <a:endParaRPr lang="en-US" sz="1200" dirty="0"/>
+          </a:p>
+          <a:p>
+            <a:endParaRPr lang="en-US" sz="1200" dirty="0"/>
+          </a:p>
+          <a:p>
+            <a:r>
+              <a:rPr lang="en-US" sz="1200" dirty="0"/>
+              <a:t>Develop for Azure Files with Python - </a:t>
+            </a:r>
+          </a:p>
+          <a:p>
+            <a:r>
+              <a:rPr lang="en-US" sz="1200" dirty="0"/>
+              <a:t> - </a:t>
+            </a:r>
+            <a:r>
+              <a:rPr lang="en-US" sz="1200" u="sng" dirty="0">
+                <a:hlinkClick r:id="rId4"/>
+              </a:rPr>
+              <a:t>https://docs.microsoft.com/en-us/azure/storage/files/storage-python-how-to-use-file-storage</a:t>
+            </a:r>
+            <a:endParaRPr lang="en-US" sz="1200" dirty="0"/>
+          </a:p>
+          <a:p>
+            <a:endParaRPr lang="en-US" sz="1200" dirty="0"/>
+          </a:p>
+          <a:p>
+            <a:r>
+              <a:rPr lang="en-US" sz="1200" dirty="0"/>
+              <a:t>Azure for Python Developers - </a:t>
+            </a:r>
+          </a:p>
+          <a:p>
+            <a:r>
+              <a:rPr lang="en-US" sz="1200" dirty="0"/>
+              <a:t> - </a:t>
+            </a:r>
+            <a:r>
+              <a:rPr lang="en-US" sz="1200" u="sng" dirty="0">
+                <a:hlinkClick r:id="rId5"/>
+              </a:rPr>
+              <a:t>https://docs.microsoft.com/en-us/azure/developer/python/</a:t>
+            </a:r>
+            <a:r>
+              <a:rPr lang="en-US" sz="1200" dirty="0"/>
+              <a:t> </a:t>
+            </a:r>
+          </a:p>
+          <a:p>
+            <a:endParaRPr lang="en-US" sz="1200" dirty="0"/>
+          </a:p>
+          <a:p>
+            <a:r>
+              <a:rPr lang="en-US" sz="1200" dirty="0"/>
+              <a:t>Azure REST API Reference - </a:t>
+            </a:r>
+          </a:p>
+          <a:p>
+            <a:r>
+              <a:rPr lang="en-US" sz="1200" dirty="0"/>
+              <a:t> - </a:t>
+            </a:r>
+            <a:r>
+              <a:rPr lang="en-US" sz="1200" u="sng" dirty="0">
+                <a:hlinkClick r:id="rId6"/>
+              </a:rPr>
+              <a:t>https://docs.microsoft.com/en-us/rest/api/azure/</a:t>
+            </a:r>
+            <a:endParaRPr lang="en-US" sz="1200" dirty="0"/>
+          </a:p>
+          <a:p>
+            <a:endParaRPr lang="en-US" sz="1200" dirty="0"/>
+          </a:p>
+          <a:p>
+            <a:r>
+              <a:rPr lang="en-US" sz="1200" dirty="0"/>
+              <a:t>Azure SDK for Python - </a:t>
+            </a:r>
+          </a:p>
+          <a:p>
+            <a:r>
+              <a:rPr lang="en-US" sz="1200" dirty="0"/>
+              <a:t> - </a:t>
+            </a:r>
+            <a:r>
+              <a:rPr lang="en-US" sz="1200" u="sng" dirty="0">
+                <a:hlinkClick r:id="rId7"/>
+              </a:rPr>
+              <a:t>https://github.com/Azure/azure-sdk-for-python/tree/master/sdk/storage</a:t>
+            </a:r>
+            <a:endParaRPr lang="en-US" sz="1200" dirty="0"/>
+          </a:p>
+          <a:p>
+            <a:r>
+              <a:rPr lang="en-US" sz="1200" dirty="0"/>
+              <a:t> - </a:t>
+            </a:r>
+            <a:r>
+              <a:rPr lang="en-US" sz="1200" u="sng" dirty="0">
+                <a:hlinkClick r:id="rId8"/>
+              </a:rPr>
+              <a:t>https://docs.microsoft.com/en-us/python/api/overview/azure/ml/?view=azure-ml-py</a:t>
+            </a:r>
+            <a:r>
+              <a:rPr lang="en-US" sz="1200" dirty="0"/>
+              <a:t> – </a:t>
+            </a:r>
+          </a:p>
+          <a:p>
+            <a:endParaRPr lang="en-US" sz="1200" dirty="0"/>
+          </a:p>
+          <a:p>
+            <a:r>
+              <a:rPr lang="en-US" sz="1200" dirty="0"/>
+              <a:t>Azure SDK – trigger published pipeline - </a:t>
+            </a:r>
+          </a:p>
+          <a:p>
+            <a:r>
+              <a:rPr lang="en-US" sz="1200" dirty="0"/>
+              <a:t> - </a:t>
+            </a:r>
+            <a:r>
+              <a:rPr lang="en-US" sz="1200" dirty="0">
+                <a:hlinkClick r:id="rId9"/>
+              </a:rPr>
+              <a:t>https://docs.microsoft.com/en-us/azure/machine-learning/how-to-trigger-published-pipeline#trigger-pipelines-with-azure-machine-learning-sdk-for-python</a:t>
+            </a:r>
+            <a:r>
+              <a:rPr lang="en-US" sz="1200" dirty="0"/>
+              <a:t> –</a:t>
+            </a:r>
+          </a:p>
+          <a:p>
+            <a:endParaRPr lang="en-US" sz="1200" dirty="0"/>
+          </a:p>
+          <a:p>
+            <a:r>
+              <a:rPr lang="en-US" sz="1200" dirty="0"/>
+              <a:t>Automate ML Experiments</a:t>
+            </a:r>
+          </a:p>
+          <a:p>
+            <a:r>
+              <a:rPr lang="en-US" sz="1200" dirty="0"/>
+              <a:t> - </a:t>
+            </a:r>
+            <a:r>
+              <a:rPr lang="en-US" sz="1200" dirty="0">
+                <a:hlinkClick r:id="rId10"/>
+              </a:rPr>
+              <a:t>https://docs.microsoft.com/en-us/azure/machine-learning/how-to-use-automlstep-in-pipelines</a:t>
+            </a:r>
+            <a:r>
+              <a:rPr lang="en-US" sz="1200" dirty="0"/>
+              <a:t> - </a:t>
+            </a:r>
+          </a:p>
+          <a:p>
+            <a:r>
+              <a:rPr lang="en-US" sz="1200" dirty="0"/>
+              <a:t> - </a:t>
+            </a:r>
+            <a:r>
+              <a:rPr lang="en-US" sz="1200" dirty="0">
+                <a:hlinkClick r:id="rId11"/>
+              </a:rPr>
+              <a:t>https://towardsdatascience.com/hidden-tricks-for-running-automl-experiment-from-azure-machine-learning-sdk-915d4e3f840e</a:t>
+            </a:r>
+            <a:r>
+              <a:rPr lang="en-US" sz="1200" dirty="0"/>
+              <a:t> - </a:t>
+            </a:r>
+          </a:p>
+          <a:p>
+            <a:endParaRPr lang="en-US" sz="1200" dirty="0"/>
+          </a:p>
+          <a:p>
+            <a:r>
+              <a:rPr lang="en-US" sz="1200" dirty="0"/>
+              <a:t>Understand </a:t>
+            </a:r>
+            <a:r>
+              <a:rPr lang="en-US" sz="1200" dirty="0" err="1"/>
+              <a:t>AutoML</a:t>
+            </a:r>
+            <a:endParaRPr lang="en-US" sz="1200" dirty="0"/>
+          </a:p>
+          <a:p>
+            <a:r>
+              <a:rPr lang="en-US" sz="1200" dirty="0"/>
+              <a:t> - </a:t>
+            </a:r>
+            <a:r>
+              <a:rPr lang="en-US" sz="1200" dirty="0">
+                <a:hlinkClick r:id="rId12"/>
+              </a:rPr>
+              <a:t>https://docs.microsoft.com/en-us/azure/machine-learning/how-to-understand-automated-ml#regressionforecasting-metrics</a:t>
+            </a:r>
+            <a:r>
+              <a:rPr lang="en-US" sz="1200" dirty="0"/>
+              <a:t> - </a:t>
+            </a:r>
+          </a:p>
+          <a:p>
+            <a:r>
+              <a:rPr lang="en-US" sz="1200" dirty="0"/>
+              <a:t> - </a:t>
+            </a:r>
+            <a:r>
+              <a:rPr lang="en-US" sz="1200" dirty="0">
+                <a:hlinkClick r:id="rId13"/>
+              </a:rPr>
+              <a:t>https://docs.microsoft.com/en-us/azure/machine-learning/how-to-configure-auto-train#primary-metric</a:t>
+            </a:r>
+            <a:r>
+              <a:rPr lang="en-US" sz="1200" dirty="0"/>
+              <a:t> - </a:t>
+            </a:r>
+          </a:p>
+        </p:txBody>
+      </p:sp>
+    </p:spTree>
+    <p:extLst>
+      <p:ext uri="{BB962C8B-B14F-4D97-AF65-F5344CB8AC3E}">
+        <p14:creationId xmlns:p14="http://schemas.microsoft.com/office/powerpoint/2010/main" val="927318114"/>
+      </p:ext>
+    </p:extLst>
+  </p:cSld>
+  <p:clrMapOvr>
+    <a:masterClrMapping/>
+  </p:clrMapOvr>
+</p:sld>
+</file>
+
+<file path=ppt/slides/slide6.xml><?xml version="1.0" encoding="utf-8"?>
 <p:sld xmlns:a="http://schemas.openxmlformats.org/drawingml/2006/main" xmlns:r="http://schemas.openxmlformats.org/officeDocument/2006/relationships" xmlns:p="http://schemas.openxmlformats.org/presentationml/2006/main">
   <p:cSld>
     <p:spTree>
@@ -13527,7 +14443,7 @@
 </p:sld>
 </file>
 
-<file path=ppt/slides/slide4.xml><?xml version="1.0" encoding="utf-8"?>
+<file path=ppt/slides/slide7.xml><?xml version="1.0" encoding="utf-8"?>
 <p:sld xmlns:a="http://schemas.openxmlformats.org/drawingml/2006/main" xmlns:r="http://schemas.openxmlformats.org/officeDocument/2006/relationships" xmlns:p="http://schemas.openxmlformats.org/presentationml/2006/main">
   <p:cSld>
     <p:spTree>
@@ -13559,7 +14475,7 @@
         <p:spPr>
           <a:xfrm>
             <a:off x="463296" y="316992"/>
-            <a:ext cx="11167872" cy="2123658"/>
+            <a:ext cx="11167872" cy="1569660"/>
           </a:xfrm>
           <a:prstGeom prst="rect">
             <a:avLst/>
@@ -13686,20 +14602,171 @@
               <a:t> - </a:t>
             </a:r>
           </a:p>
-          <a:p>
-            <a:r>
-              <a:rPr lang="en-US" sz="1200" dirty="0"/>
-              <a:t> - </a:t>
-            </a:r>
-          </a:p>
-          <a:p>
-            <a:r>
-              <a:rPr lang="en-US" sz="1200" dirty="0"/>
-              <a:t> - </a:t>
-            </a:r>
-          </a:p>
-          <a:p>
-            <a:endParaRPr lang="en-US" sz="1200" dirty="0"/>
+        </p:txBody>
+      </p:sp>
+      <p:sp>
+        <p:nvSpPr>
+          <p:cNvPr id="2" name="TextBox 1">
+            <a:extLst>
+              <a:ext uri="{FF2B5EF4-FFF2-40B4-BE49-F238E27FC236}">
+                <a16:creationId xmlns:a16="http://schemas.microsoft.com/office/drawing/2014/main" id="{AD6F75D9-FF22-714C-8ECB-FD844B7B1C37}"/>
+              </a:ext>
+            </a:extLst>
+          </p:cNvPr>
+          <p:cNvSpPr txBox="1"/>
+          <p:nvPr/>
+        </p:nvSpPr>
+        <p:spPr>
+          <a:xfrm>
+            <a:off x="463296" y="2548128"/>
+            <a:ext cx="10106092" cy="2462213"/>
+          </a:xfrm>
+          <a:prstGeom prst="rect">
+            <a:avLst/>
+          </a:prstGeom>
+          <a:noFill/>
+        </p:spPr>
+        <p:txBody>
+          <a:bodyPr wrap="square" rtlCol="0">
+            <a:spAutoFit/>
+          </a:bodyPr>
+          <a:lstStyle/>
+          <a:p>
+            <a:r>
+              <a:rPr lang="en-US" dirty="0"/>
+              <a:t>More links about deploying ML models &amp; pipelines</a:t>
+            </a:r>
+          </a:p>
+          <a:p>
+            <a:endParaRPr lang="en-US" dirty="0"/>
+          </a:p>
+          <a:p>
+            <a:pPr marL="285750" indent="-285750">
+              <a:buFont typeface="Arial" panose="020B0604020202020204" pitchFamily="34" charset="0"/>
+              <a:buChar char="•"/>
+            </a:pPr>
+            <a:r>
+              <a:rPr lang="en-US" dirty="0">
+                <a:hlinkClick r:id="rId7"/>
+              </a:rPr>
+              <a:t>https://azure.microsoft.com/en-us/blog/retraining-and-updating-azure-machine-learning-models-with-azure-data-factory/</a:t>
+            </a:r>
+            <a:r>
+              <a:rPr lang="en-US" dirty="0"/>
+              <a:t> </a:t>
+            </a:r>
+          </a:p>
+          <a:p>
+            <a:pPr marL="285750" indent="-285750">
+              <a:buFont typeface="Arial" panose="020B0604020202020204" pitchFamily="34" charset="0"/>
+              <a:buChar char="•"/>
+            </a:pPr>
+            <a:r>
+              <a:rPr lang="en-US" dirty="0">
+                <a:hlinkClick r:id="rId8"/>
+              </a:rPr>
+              <a:t>https://azure.microsoft.com/en-us/blog/azure-data-factory-updates-integration-with-azure-machine-learning-2/</a:t>
+            </a:r>
+            <a:r>
+              <a:rPr lang="en-US" dirty="0"/>
+              <a:t> </a:t>
+            </a:r>
+          </a:p>
+          <a:p>
+            <a:pPr marL="285750" indent="-285750">
+              <a:buFont typeface="Arial" panose="020B0604020202020204" pitchFamily="34" charset="0"/>
+              <a:buChar char="•"/>
+            </a:pPr>
+            <a:r>
+              <a:rPr lang="en-US" dirty="0">
+                <a:hlinkClick r:id="rId9"/>
+              </a:rPr>
+              <a:t>https://docs.microsoft.com/en-us/azure///data-factory/transform-data-machine-learning-service</a:t>
+            </a:r>
+            <a:r>
+              <a:rPr lang="en-US" dirty="0"/>
+              <a:t> </a:t>
+            </a:r>
+          </a:p>
+          <a:p>
+            <a:pPr marL="285750" indent="-285750">
+              <a:buFont typeface="Arial" panose="020B0604020202020204" pitchFamily="34" charset="0"/>
+              <a:buChar char="•"/>
+            </a:pPr>
+            <a:r>
+              <a:rPr lang="en-US" dirty="0">
+                <a:hlinkClick r:id="rId10"/>
+              </a:rPr>
+              <a:t>https://docs.microsoft.com/en-us/azure/machine-learning/tutorial-pipeline-batch-scoring-classification</a:t>
+            </a:r>
+            <a:r>
+              <a:rPr lang="en-US" dirty="0"/>
+              <a:t> </a:t>
+            </a:r>
+          </a:p>
+          <a:p>
+            <a:pPr marL="285750" indent="-285750">
+              <a:buFont typeface="Arial" panose="020B0604020202020204" pitchFamily="34" charset="0"/>
+              <a:buChar char="•"/>
+            </a:pPr>
+            <a:r>
+              <a:rPr lang="en-US" dirty="0">
+                <a:hlinkClick r:id="rId11"/>
+              </a:rPr>
+              <a:t>https://www.youtube.com/watch?v=lVP7ywRq8p4</a:t>
+            </a:r>
+            <a:r>
+              <a:rPr lang="en-US" dirty="0"/>
+              <a:t> </a:t>
+            </a:r>
+          </a:p>
+          <a:p>
+            <a:pPr marL="285750" indent="-285750">
+              <a:buFont typeface="Arial" panose="020B0604020202020204" pitchFamily="34" charset="0"/>
+              <a:buChar char="•"/>
+            </a:pPr>
+            <a:r>
+              <a:rPr lang="en-US" dirty="0">
+                <a:hlinkClick r:id="rId12"/>
+              </a:rPr>
+              <a:t>https://www.youtube.com/watch?v=7k4XvM4wd0k</a:t>
+            </a:r>
+            <a:endParaRPr lang="en-US" dirty="0"/>
+          </a:p>
+          <a:p>
+            <a:pPr marL="285750" indent="-285750">
+              <a:buFont typeface="Arial" panose="020B0604020202020204" pitchFamily="34" charset="0"/>
+              <a:buChar char="•"/>
+            </a:pPr>
+            <a:r>
+              <a:rPr lang="en-US" dirty="0">
+                <a:hlinkClick r:id="rId13"/>
+              </a:rPr>
+              <a:t>https://docs.microsoft.com/en-us/azure/machine-learning/</a:t>
+            </a:r>
+            <a:r>
+              <a:rPr lang="en-US" dirty="0"/>
+              <a:t> </a:t>
+            </a:r>
+          </a:p>
+          <a:p>
+            <a:pPr marL="285750" indent="-285750">
+              <a:buFont typeface="Arial" panose="020B0604020202020204" pitchFamily="34" charset="0"/>
+              <a:buChar char="•"/>
+            </a:pPr>
+            <a:r>
+              <a:rPr lang="en-US" dirty="0">
+                <a:hlinkClick r:id="rId14"/>
+              </a:rPr>
+              <a:t>https://docs.microsoft.com/en-us/learn/paths/build-ai-solutions-with-azure-ml-service/</a:t>
+            </a:r>
+            <a:endParaRPr lang="en-US" dirty="0"/>
+          </a:p>
+          <a:p>
+            <a:r>
+              <a:rPr lang="en-US" dirty="0"/>
+              <a:t>-</a:t>
+            </a:r>
           </a:p>
         </p:txBody>
       </p:sp>
